--- a/reports/Parque_Arauco/CONSOLIDADO/Fichas_onepage_PA_20260908.pptx
+++ b/reports/Parque_Arauco/CONSOLIDADO/Fichas_onepage_PA_20260908.pptx
@@ -14,6 +14,7 @@
     <p:sldId id="262" r:id="rId13"/>
     <p:sldId id="263" r:id="rId14"/>
     <p:sldId id="264" r:id="rId15"/>
+    <p:sldId id="265" r:id="rId16"/>
   </p:sldIdLst>
   <p:sldSz cx="12191695" cy="6858000" type="screen4x3"/>
   <p:notesSz cx="6858000" cy="9144000"/>
@@ -3299,7 +3300,7 @@
                 </a:solidFill>
                 <a:latin typeface="Calibri"/>
               </a:rPr>
-              <a:t>Ya operativo: Estanque Sur, Estanque Norte, San Ignacio 500.  A copiar: Quilicura, Bazar Gourmet, DL Kennedy, El Bosque 1° piso, Falabella Maipú.</a:t>
+              <a:t>Ya operativo (control WES): Estanque Norte y San Ignacio 500.  A copiar: Quilicura, Bazar Gourmet, Andén 3-4 Matriz, El Bosque 1° piso, Falabella Maipú.</a:t>
             </a:r>
           </a:p>
           <a:p>
@@ -3316,6 +3317,853 @@
                 <a:latin typeface="Calibri"/>
               </a:rPr>
               <a:t>Datos al 08/09/2026  ·  tarifa $1.400/m³  ·  corte 00:30 → cero 01:00–05:00</a:t>
+            </a:r>
+          </a:p>
+        </p:txBody>
+      </p:sp>
+    </p:spTree>
+  </p:cSld>
+  <p:clrMapOvr>
+    <a:masterClrMapping/>
+  </p:clrMapOvr>
+</p:sld>
+</file>
+
+<file path=ppt/slides/slide10.xml><?xml version="1.0" encoding="utf-8"?>
+<p:sld xmlns:a="http://schemas.openxmlformats.org/drawingml/2006/main" xmlns:p="http://schemas.openxmlformats.org/presentationml/2006/main" xmlns:r="http://schemas.openxmlformats.org/officeDocument/2006/relationships">
+  <p:cSld>
+    <p:spTree>
+      <p:nvGrpSpPr>
+        <p:cNvPr id="1" name=""/>
+        <p:cNvGrpSpPr/>
+        <p:nvPr/>
+      </p:nvGrpSpPr>
+      <p:grpSpPr/>
+      <p:sp>
+        <p:nvSpPr>
+          <p:cNvPr id="2" name="Rectangle 1"/>
+          <p:cNvSpPr/>
+          <p:nvPr/>
+        </p:nvSpPr>
+        <p:spPr>
+          <a:xfrm>
+            <a:off x="0" y="0"/>
+            <a:ext cx="12191695" cy="841248"/>
+          </a:xfrm>
+          <a:prstGeom prst="rect">
+            <a:avLst/>
+          </a:prstGeom>
+          <a:solidFill>
+            <a:srgbClr val="0D3B66"/>
+          </a:solidFill>
+          <a:ln>
+            <a:noFill/>
+          </a:ln>
+        </p:spPr>
+        <p:style>
+          <a:lnRef idx="1">
+            <a:schemeClr val="accent1"/>
+          </a:lnRef>
+          <a:fillRef idx="3">
+            <a:schemeClr val="accent1"/>
+          </a:fillRef>
+          <a:effectRef idx="2">
+            <a:schemeClr val="accent1"/>
+          </a:effectRef>
+          <a:fontRef idx="minor">
+            <a:schemeClr val="lt1"/>
+          </a:fontRef>
+        </p:style>
+        <p:txBody>
+          <a:bodyPr rtlCol="0" anchor="ctr"/>
+          <a:lstStyle/>
+          <a:p>
+            <a:pPr algn="ctr"/>
+          </a:p>
+        </p:txBody>
+      </p:sp>
+      <p:sp>
+        <p:nvSpPr>
+          <p:cNvPr id="3" name="Rectangle 2"/>
+          <p:cNvSpPr/>
+          <p:nvPr/>
+        </p:nvSpPr>
+        <p:spPr>
+          <a:xfrm>
+            <a:off x="0" y="841248"/>
+            <a:ext cx="12191695" cy="54864"/>
+          </a:xfrm>
+          <a:prstGeom prst="rect">
+            <a:avLst/>
+          </a:prstGeom>
+          <a:solidFill>
+            <a:srgbClr val="C9A227"/>
+          </a:solidFill>
+          <a:ln>
+            <a:noFill/>
+          </a:ln>
+        </p:spPr>
+        <p:style>
+          <a:lnRef idx="1">
+            <a:schemeClr val="accent1"/>
+          </a:lnRef>
+          <a:fillRef idx="3">
+            <a:schemeClr val="accent1"/>
+          </a:fillRef>
+          <a:effectRef idx="2">
+            <a:schemeClr val="accent1"/>
+          </a:effectRef>
+          <a:fontRef idx="minor">
+            <a:schemeClr val="lt1"/>
+          </a:fontRef>
+        </p:style>
+        <p:txBody>
+          <a:bodyPr rtlCol="0" anchor="ctr"/>
+          <a:lstStyle/>
+          <a:p>
+            <a:pPr algn="ctr"/>
+          </a:p>
+        </p:txBody>
+      </p:sp>
+      <p:pic>
+        <p:nvPicPr>
+          <p:cNvPr id="4" name="Picture 3" descr="logo wes.bmp"/>
+          <p:cNvPicPr>
+            <a:picLocks noChangeAspect="1"/>
+          </p:cNvPicPr>
+          <p:nvPr/>
+        </p:nvPicPr>
+        <p:blipFill>
+          <a:blip r:embed="rId2"/>
+          <a:stretch>
+            <a:fillRect/>
+          </a:stretch>
+        </p:blipFill>
+        <p:spPr>
+          <a:xfrm>
+            <a:off x="10835640" y="146304"/>
+            <a:ext cx="1143000" cy="253401"/>
+          </a:xfrm>
+          <a:prstGeom prst="rect">
+            <a:avLst/>
+          </a:prstGeom>
+        </p:spPr>
+      </p:pic>
+      <p:sp>
+        <p:nvSpPr>
+          <p:cNvPr id="5" name="TextBox 4"/>
+          <p:cNvSpPr txBox="1"/>
+          <p:nvPr/>
+        </p:nvSpPr>
+        <p:spPr>
+          <a:xfrm>
+            <a:off x="256032" y="109728"/>
+            <a:ext cx="10607040" cy="384048"/>
+          </a:xfrm>
+          <a:prstGeom prst="rect">
+            <a:avLst/>
+          </a:prstGeom>
+          <a:noFill/>
+        </p:spPr>
+        <p:txBody>
+          <a:bodyPr wrap="square">
+            <a:spAutoFit/>
+          </a:bodyPr>
+          <a:lstStyle/>
+          <a:p>
+            <a:pPr algn="l">
+              <a:spcAft>
+                <a:spcPts val="300"/>
+              </a:spcAft>
+            </a:pPr>
+            <a:r>
+              <a:rPr sz="2000" b="1">
+                <a:solidFill>
+                  <a:srgbClr val="FFFFFF"/>
+                </a:solidFill>
+                <a:latin typeface="Calibri"/>
+              </a:rPr>
+              <a:t>MAM  ·  Falabella</a:t>
+            </a:r>
+          </a:p>
+        </p:txBody>
+      </p:sp>
+      <p:sp>
+        <p:nvSpPr>
+          <p:cNvPr id="6" name="TextBox 5"/>
+          <p:cNvSpPr txBox="1"/>
+          <p:nvPr/>
+        </p:nvSpPr>
+        <p:spPr>
+          <a:xfrm>
+            <a:off x="256032" y="457200"/>
+            <a:ext cx="10607040" cy="329184"/>
+          </a:xfrm>
+          <a:prstGeom prst="rect">
+            <a:avLst/>
+          </a:prstGeom>
+          <a:noFill/>
+        </p:spPr>
+        <p:txBody>
+          <a:bodyPr wrap="square">
+            <a:spAutoFit/>
+          </a:bodyPr>
+          <a:lstStyle/>
+          <a:p>
+            <a:pPr algn="l">
+              <a:spcAft>
+                <a:spcPts val="300"/>
+              </a:spcAft>
+            </a:pPr>
+            <a:r>
+              <a:rPr sz="1100" b="0">
+                <a:solidFill>
+                  <a:srgbClr val="DCE6F0"/>
+                </a:solidFill>
+                <a:latin typeface="Calibri"/>
+              </a:rPr>
+              <a:t>A copiar  ·  corte 00:30  ·  000025-09  ·  umbral 140 m³/día  ·  mall sale por Falabella desde 15/08</a:t>
+            </a:r>
+          </a:p>
+        </p:txBody>
+      </p:sp>
+      <p:sp>
+        <p:nvSpPr>
+          <p:cNvPr id="7" name="Rounded Rectangle 6"/>
+          <p:cNvSpPr/>
+          <p:nvPr/>
+        </p:nvSpPr>
+        <p:spPr>
+          <a:xfrm>
+            <a:off x="201168" y="1024128"/>
+            <a:ext cx="2331720" cy="329184"/>
+          </a:xfrm>
+          <a:prstGeom prst="roundRect">
+            <a:avLst>
+              <a:gd name="adj" fmla="val 8000"/>
+            </a:avLst>
+          </a:prstGeom>
+          <a:solidFill>
+            <a:srgbClr val="FFF9EB"/>
+          </a:solidFill>
+          <a:ln w="6350">
+            <a:solidFill>
+              <a:srgbClr val="C9A227"/>
+            </a:solidFill>
+          </a:ln>
+        </p:spPr>
+        <p:style>
+          <a:lnRef idx="1">
+            <a:schemeClr val="accent1"/>
+          </a:lnRef>
+          <a:fillRef idx="3">
+            <a:schemeClr val="accent1"/>
+          </a:fillRef>
+          <a:effectRef idx="2">
+            <a:schemeClr val="accent1"/>
+          </a:effectRef>
+          <a:fontRef idx="minor">
+            <a:schemeClr val="lt1"/>
+          </a:fontRef>
+        </p:style>
+        <p:txBody>
+          <a:bodyPr rtlCol="0" anchor="ctr"/>
+          <a:lstStyle/>
+          <a:p>
+            <a:pPr algn="ctr"/>
+          </a:p>
+        </p:txBody>
+      </p:sp>
+      <p:sp>
+        <p:nvSpPr>
+          <p:cNvPr id="8" name="TextBox 7"/>
+          <p:cNvSpPr txBox="1"/>
+          <p:nvPr/>
+        </p:nvSpPr>
+        <p:spPr>
+          <a:xfrm>
+            <a:off x="274320" y="1060704"/>
+            <a:ext cx="2194560" cy="256032"/>
+          </a:xfrm>
+          <a:prstGeom prst="rect">
+            <a:avLst/>
+          </a:prstGeom>
+          <a:noFill/>
+        </p:spPr>
+        <p:txBody>
+          <a:bodyPr wrap="square">
+            <a:spAutoFit/>
+          </a:bodyPr>
+          <a:lstStyle/>
+          <a:p>
+            <a:pPr algn="ctr">
+              <a:spcAft>
+                <a:spcPts val="300"/>
+              </a:spcAft>
+            </a:pPr>
+            <a:r>
+              <a:rPr sz="1200" b="1">
+                <a:solidFill>
+                  <a:srgbClr val="C9A227"/>
+                </a:solidFill>
+                <a:latin typeface="Calibri"/>
+              </a:rPr>
+              <a:t>A PROPONER</a:t>
+            </a:r>
+          </a:p>
+        </p:txBody>
+      </p:sp>
+      <p:sp>
+        <p:nvSpPr>
+          <p:cNvPr id="9" name="Rounded Rectangle 8"/>
+          <p:cNvSpPr/>
+          <p:nvPr/>
+        </p:nvSpPr>
+        <p:spPr>
+          <a:xfrm>
+            <a:off x="201168" y="1444752"/>
+            <a:ext cx="3840480" cy="987552"/>
+          </a:xfrm>
+          <a:prstGeom prst="roundRect">
+            <a:avLst>
+              <a:gd name="adj" fmla="val 8000"/>
+            </a:avLst>
+          </a:prstGeom>
+          <a:solidFill>
+            <a:srgbClr val="FFFFFF"/>
+          </a:solidFill>
+          <a:ln w="6350">
+            <a:solidFill>
+              <a:srgbClr val="C9A227"/>
+            </a:solidFill>
+          </a:ln>
+        </p:spPr>
+        <p:style>
+          <a:lnRef idx="1">
+            <a:schemeClr val="accent1"/>
+          </a:lnRef>
+          <a:fillRef idx="3">
+            <a:schemeClr val="accent1"/>
+          </a:fillRef>
+          <a:effectRef idx="2">
+            <a:schemeClr val="accent1"/>
+          </a:effectRef>
+          <a:fontRef idx="minor">
+            <a:schemeClr val="lt1"/>
+          </a:fontRef>
+        </p:style>
+        <p:txBody>
+          <a:bodyPr rtlCol="0" anchor="ctr"/>
+          <a:lstStyle/>
+          <a:p>
+            <a:pPr algn="ctr"/>
+          </a:p>
+        </p:txBody>
+      </p:sp>
+      <p:sp>
+        <p:nvSpPr>
+          <p:cNvPr id="10" name="TextBox 9"/>
+          <p:cNvSpPr txBox="1"/>
+          <p:nvPr/>
+        </p:nvSpPr>
+        <p:spPr>
+          <a:xfrm>
+            <a:off x="310896" y="1517904"/>
+            <a:ext cx="3639312" cy="201168"/>
+          </a:xfrm>
+          <a:prstGeom prst="rect">
+            <a:avLst/>
+          </a:prstGeom>
+          <a:noFill/>
+        </p:spPr>
+        <p:txBody>
+          <a:bodyPr wrap="square">
+            <a:spAutoFit/>
+          </a:bodyPr>
+          <a:lstStyle/>
+          <a:p>
+            <a:pPr algn="l">
+              <a:spcAft>
+                <a:spcPts val="300"/>
+              </a:spcAft>
+            </a:pPr>
+            <a:r>
+              <a:rPr sz="1100" b="1">
+                <a:solidFill>
+                  <a:srgbClr val="5A5A5A"/>
+                </a:solidFill>
+                <a:latin typeface="Calibri"/>
+              </a:rPr>
+              <a:t>Noche típica</a:t>
+            </a:r>
+          </a:p>
+        </p:txBody>
+      </p:sp>
+      <p:sp>
+        <p:nvSpPr>
+          <p:cNvPr id="11" name="TextBox 10"/>
+          <p:cNvSpPr txBox="1"/>
+          <p:nvPr/>
+        </p:nvSpPr>
+        <p:spPr>
+          <a:xfrm>
+            <a:off x="310896" y="1737360"/>
+            <a:ext cx="3639312" cy="365760"/>
+          </a:xfrm>
+          <a:prstGeom prst="rect">
+            <a:avLst/>
+          </a:prstGeom>
+          <a:noFill/>
+        </p:spPr>
+        <p:txBody>
+          <a:bodyPr wrap="square">
+            <a:spAutoFit/>
+          </a:bodyPr>
+          <a:lstStyle/>
+          <a:p>
+            <a:pPr algn="l">
+              <a:spcAft>
+                <a:spcPts val="300"/>
+              </a:spcAft>
+            </a:pPr>
+            <a:r>
+              <a:rPr sz="2200" b="1">
+                <a:solidFill>
+                  <a:srgbClr val="0D3B66"/>
+                </a:solidFill>
+                <a:latin typeface="Calibri"/>
+              </a:rPr>
+              <a:t>8,3 → 0</a:t>
+            </a:r>
+          </a:p>
+        </p:txBody>
+      </p:sp>
+      <p:sp>
+        <p:nvSpPr>
+          <p:cNvPr id="12" name="TextBox 11"/>
+          <p:cNvSpPr txBox="1"/>
+          <p:nvPr/>
+        </p:nvSpPr>
+        <p:spPr>
+          <a:xfrm>
+            <a:off x="310896" y="2121408"/>
+            <a:ext cx="3639312" cy="237744"/>
+          </a:xfrm>
+          <a:prstGeom prst="rect">
+            <a:avLst/>
+          </a:prstGeom>
+          <a:noFill/>
+        </p:spPr>
+        <p:txBody>
+          <a:bodyPr wrap="square">
+            <a:spAutoFit/>
+          </a:bodyPr>
+          <a:lstStyle/>
+          <a:p>
+            <a:pPr algn="l">
+              <a:spcAft>
+                <a:spcPts val="300"/>
+              </a:spcAft>
+            </a:pPr>
+            <a:r>
+              <a:rPr sz="1100" b="0">
+                <a:solidFill>
+                  <a:srgbClr val="5A5A5A"/>
+                </a:solidFill>
+                <a:latin typeface="Calibri"/>
+              </a:rPr>
+              <a:t>m³ desde 00:30</a:t>
+            </a:r>
+          </a:p>
+        </p:txBody>
+      </p:sp>
+      <p:sp>
+        <p:nvSpPr>
+          <p:cNvPr id="13" name="Rounded Rectangle 12"/>
+          <p:cNvSpPr/>
+          <p:nvPr/>
+        </p:nvSpPr>
+        <p:spPr>
+          <a:xfrm>
+            <a:off x="4169663" y="1444752"/>
+            <a:ext cx="3840480" cy="987552"/>
+          </a:xfrm>
+          <a:prstGeom prst="roundRect">
+            <a:avLst>
+              <a:gd name="adj" fmla="val 8000"/>
+            </a:avLst>
+          </a:prstGeom>
+          <a:solidFill>
+            <a:srgbClr val="FFFFFF"/>
+          </a:solidFill>
+          <a:ln w="6350">
+            <a:solidFill>
+              <a:srgbClr val="C9A227"/>
+            </a:solidFill>
+          </a:ln>
+        </p:spPr>
+        <p:style>
+          <a:lnRef idx="1">
+            <a:schemeClr val="accent1"/>
+          </a:lnRef>
+          <a:fillRef idx="3">
+            <a:schemeClr val="accent1"/>
+          </a:fillRef>
+          <a:effectRef idx="2">
+            <a:schemeClr val="accent1"/>
+          </a:effectRef>
+          <a:fontRef idx="minor">
+            <a:schemeClr val="lt1"/>
+          </a:fontRef>
+        </p:style>
+        <p:txBody>
+          <a:bodyPr rtlCol="0" anchor="ctr"/>
+          <a:lstStyle/>
+          <a:p>
+            <a:pPr algn="ctr"/>
+          </a:p>
+        </p:txBody>
+      </p:sp>
+      <p:sp>
+        <p:nvSpPr>
+          <p:cNvPr id="14" name="TextBox 13"/>
+          <p:cNvSpPr txBox="1"/>
+          <p:nvPr/>
+        </p:nvSpPr>
+        <p:spPr>
+          <a:xfrm>
+            <a:off x="4279392" y="1517904"/>
+            <a:ext cx="3639312" cy="201168"/>
+          </a:xfrm>
+          <a:prstGeom prst="rect">
+            <a:avLst/>
+          </a:prstGeom>
+          <a:noFill/>
+        </p:spPr>
+        <p:txBody>
+          <a:bodyPr wrap="square">
+            <a:spAutoFit/>
+          </a:bodyPr>
+          <a:lstStyle/>
+          <a:p>
+            <a:pPr algn="l">
+              <a:spcAft>
+                <a:spcPts val="300"/>
+              </a:spcAft>
+            </a:pPr>
+            <a:r>
+              <a:rPr sz="1100" b="1">
+                <a:solidFill>
+                  <a:srgbClr val="5A5A5A"/>
+                </a:solidFill>
+                <a:latin typeface="Calibri"/>
+              </a:rPr>
+              <a:t>Proyección</a:t>
+            </a:r>
+          </a:p>
+        </p:txBody>
+      </p:sp>
+      <p:sp>
+        <p:nvSpPr>
+          <p:cNvPr id="15" name="TextBox 14"/>
+          <p:cNvSpPr txBox="1"/>
+          <p:nvPr/>
+        </p:nvSpPr>
+        <p:spPr>
+          <a:xfrm>
+            <a:off x="4279392" y="1737360"/>
+            <a:ext cx="3639312" cy="365760"/>
+          </a:xfrm>
+          <a:prstGeom prst="rect">
+            <a:avLst/>
+          </a:prstGeom>
+          <a:noFill/>
+        </p:spPr>
+        <p:txBody>
+          <a:bodyPr wrap="square">
+            <a:spAutoFit/>
+          </a:bodyPr>
+          <a:lstStyle/>
+          <a:p>
+            <a:pPr algn="l">
+              <a:spcAft>
+                <a:spcPts val="300"/>
+              </a:spcAft>
+            </a:pPr>
+            <a:r>
+              <a:rPr sz="2200" b="1">
+                <a:solidFill>
+                  <a:srgbClr val="0D3B66"/>
+                </a:solidFill>
+                <a:latin typeface="Calibri"/>
+              </a:rPr>
+              <a:t>249</a:t>
+            </a:r>
+          </a:p>
+        </p:txBody>
+      </p:sp>
+      <p:sp>
+        <p:nvSpPr>
+          <p:cNvPr id="16" name="TextBox 15"/>
+          <p:cNvSpPr txBox="1"/>
+          <p:nvPr/>
+        </p:nvSpPr>
+        <p:spPr>
+          <a:xfrm>
+            <a:off x="4279392" y="2121408"/>
+            <a:ext cx="3639312" cy="237744"/>
+          </a:xfrm>
+          <a:prstGeom prst="rect">
+            <a:avLst/>
+          </a:prstGeom>
+          <a:noFill/>
+        </p:spPr>
+        <p:txBody>
+          <a:bodyPr wrap="square">
+            <a:spAutoFit/>
+          </a:bodyPr>
+          <a:lstStyle/>
+          <a:p>
+            <a:pPr algn="l">
+              <a:spcAft>
+                <a:spcPts val="300"/>
+              </a:spcAft>
+            </a:pPr>
+            <a:r>
+              <a:rPr sz="1100" b="0">
+                <a:solidFill>
+                  <a:srgbClr val="5A5A5A"/>
+                </a:solidFill>
+                <a:latin typeface="Calibri"/>
+              </a:rPr>
+              <a:t>m³/mes</a:t>
+            </a:r>
+          </a:p>
+        </p:txBody>
+      </p:sp>
+      <p:sp>
+        <p:nvSpPr>
+          <p:cNvPr id="17" name="Rounded Rectangle 16"/>
+          <p:cNvSpPr/>
+          <p:nvPr/>
+        </p:nvSpPr>
+        <p:spPr>
+          <a:xfrm>
+            <a:off x="8138159" y="1444752"/>
+            <a:ext cx="3840480" cy="987552"/>
+          </a:xfrm>
+          <a:prstGeom prst="roundRect">
+            <a:avLst>
+              <a:gd name="adj" fmla="val 8000"/>
+            </a:avLst>
+          </a:prstGeom>
+          <a:solidFill>
+            <a:srgbClr val="FFFFFF"/>
+          </a:solidFill>
+          <a:ln w="6350">
+            <a:solidFill>
+              <a:srgbClr val="C9A227"/>
+            </a:solidFill>
+          </a:ln>
+        </p:spPr>
+        <p:style>
+          <a:lnRef idx="1">
+            <a:schemeClr val="accent1"/>
+          </a:lnRef>
+          <a:fillRef idx="3">
+            <a:schemeClr val="accent1"/>
+          </a:fillRef>
+          <a:effectRef idx="2">
+            <a:schemeClr val="accent1"/>
+          </a:effectRef>
+          <a:fontRef idx="minor">
+            <a:schemeClr val="lt1"/>
+          </a:fontRef>
+        </p:style>
+        <p:txBody>
+          <a:bodyPr rtlCol="0" anchor="ctr"/>
+          <a:lstStyle/>
+          <a:p>
+            <a:pPr algn="ctr"/>
+          </a:p>
+        </p:txBody>
+      </p:sp>
+      <p:sp>
+        <p:nvSpPr>
+          <p:cNvPr id="18" name="TextBox 17"/>
+          <p:cNvSpPr txBox="1"/>
+          <p:nvPr/>
+        </p:nvSpPr>
+        <p:spPr>
+          <a:xfrm>
+            <a:off x="8247887" y="1517904"/>
+            <a:ext cx="3639312" cy="201168"/>
+          </a:xfrm>
+          <a:prstGeom prst="rect">
+            <a:avLst/>
+          </a:prstGeom>
+          <a:noFill/>
+        </p:spPr>
+        <p:txBody>
+          <a:bodyPr wrap="square">
+            <a:spAutoFit/>
+          </a:bodyPr>
+          <a:lstStyle/>
+          <a:p>
+            <a:pPr algn="l">
+              <a:spcAft>
+                <a:spcPts val="300"/>
+              </a:spcAft>
+            </a:pPr>
+            <a:r>
+              <a:rPr sz="1100" b="1">
+                <a:solidFill>
+                  <a:srgbClr val="5A5A5A"/>
+                </a:solidFill>
+                <a:latin typeface="Calibri"/>
+              </a:rPr>
+              <a:t>Proyección $</a:t>
+            </a:r>
+          </a:p>
+        </p:txBody>
+      </p:sp>
+      <p:sp>
+        <p:nvSpPr>
+          <p:cNvPr id="19" name="TextBox 18"/>
+          <p:cNvSpPr txBox="1"/>
+          <p:nvPr/>
+        </p:nvSpPr>
+        <p:spPr>
+          <a:xfrm>
+            <a:off x="8247887" y="1737360"/>
+            <a:ext cx="3639312" cy="365760"/>
+          </a:xfrm>
+          <a:prstGeom prst="rect">
+            <a:avLst/>
+          </a:prstGeom>
+          <a:noFill/>
+        </p:spPr>
+        <p:txBody>
+          <a:bodyPr wrap="square">
+            <a:spAutoFit/>
+          </a:bodyPr>
+          <a:lstStyle/>
+          <a:p>
+            <a:pPr algn="l">
+              <a:spcAft>
+                <a:spcPts val="300"/>
+              </a:spcAft>
+            </a:pPr>
+            <a:r>
+              <a:rPr sz="2200" b="1">
+                <a:solidFill>
+                  <a:srgbClr val="0D3B66"/>
+                </a:solidFill>
+                <a:latin typeface="Calibri"/>
+              </a:rPr>
+              <a:t>$348.390</a:t>
+            </a:r>
+          </a:p>
+        </p:txBody>
+      </p:sp>
+      <p:sp>
+        <p:nvSpPr>
+          <p:cNvPr id="20" name="TextBox 19"/>
+          <p:cNvSpPr txBox="1"/>
+          <p:nvPr/>
+        </p:nvSpPr>
+        <p:spPr>
+          <a:xfrm>
+            <a:off x="8247887" y="2121408"/>
+            <a:ext cx="3639312" cy="237744"/>
+          </a:xfrm>
+          <a:prstGeom prst="rect">
+            <a:avLst/>
+          </a:prstGeom>
+          <a:noFill/>
+        </p:spPr>
+        <p:txBody>
+          <a:bodyPr wrap="square">
+            <a:spAutoFit/>
+          </a:bodyPr>
+          <a:lstStyle/>
+          <a:p>
+            <a:pPr algn="l">
+              <a:spcAft>
+                <a:spcPts val="300"/>
+              </a:spcAft>
+            </a:pPr>
+            <a:r>
+              <a:rPr sz="1100" b="0">
+                <a:solidFill>
+                  <a:srgbClr val="5A5A5A"/>
+                </a:solidFill>
+                <a:latin typeface="Calibri"/>
+              </a:rPr>
+              <a:t>solo noches con caudal</a:t>
+            </a:r>
+          </a:p>
+        </p:txBody>
+      </p:sp>
+      <p:pic>
+        <p:nvPicPr>
+          <p:cNvPr id="21" name="Picture 20" descr="falabella.png"/>
+          <p:cNvPicPr>
+            <a:picLocks noChangeAspect="1"/>
+          </p:cNvPicPr>
+          <p:nvPr/>
+        </p:nvPicPr>
+        <p:blipFill>
+          <a:blip r:embed="rId3"/>
+          <a:stretch>
+            <a:fillRect/>
+          </a:stretch>
+        </p:blipFill>
+        <p:spPr>
+          <a:xfrm>
+            <a:off x="201168" y="2578608"/>
+            <a:ext cx="11777472" cy="3353461"/>
+          </a:xfrm>
+          <a:prstGeom prst="rect">
+            <a:avLst/>
+          </a:prstGeom>
+        </p:spPr>
+      </p:pic>
+      <p:sp>
+        <p:nvSpPr>
+          <p:cNvPr id="22" name="TextBox 21"/>
+          <p:cNvSpPr txBox="1"/>
+          <p:nvPr/>
+        </p:nvSpPr>
+        <p:spPr>
+          <a:xfrm>
+            <a:off x="256032" y="6510528"/>
+            <a:ext cx="11612880" cy="256032"/>
+          </a:xfrm>
+          <a:prstGeom prst="rect">
+            <a:avLst/>
+          </a:prstGeom>
+          <a:noFill/>
+        </p:spPr>
+        <p:txBody>
+          <a:bodyPr wrap="square">
+            <a:spAutoFit/>
+          </a:bodyPr>
+          <a:lstStyle/>
+          <a:p>
+            <a:pPr algn="l">
+              <a:spcAft>
+                <a:spcPts val="300"/>
+              </a:spcAft>
+            </a:pPr>
+            <a:r>
+              <a:rPr sz="1100" b="0">
+                <a:solidFill>
+                  <a:srgbClr val="5A5A5A"/>
+                </a:solidFill>
+                <a:latin typeface="Calibri"/>
+              </a:rPr>
+              <a:t>Placa y Falabella son alimentación alternativa, no dos fallas. Arrow + punto 6 (Pasillo 2) sigue pendiente con Don Miguel.</a:t>
             </a:r>
           </a:p>
         </p:txBody>
@@ -3482,7 +4330,7 @@
                 </a:solidFill>
                 <a:latin typeface="Calibri"/>
               </a:rPr>
-              <a:t>MAE  ·  Estanque Sur</a:t>
+              <a:t>Futuros puntos de control</a:t>
             </a:r>
           </a:p>
         </p:txBody>
@@ -3521,592 +4369,14 @@
                 </a:solidFill>
                 <a:latin typeface="Calibri"/>
               </a:rPr>
-              <a:t>Presostatos 10/06  ·  10/06/2026  ·  000025-19  ·  08/09/2026</a:t>
-            </a:r>
-          </a:p>
-        </p:txBody>
-      </p:sp>
-      <p:sp>
-        <p:nvSpPr>
-          <p:cNvPr id="7" name="Rounded Rectangle 6"/>
-          <p:cNvSpPr/>
-          <p:nvPr/>
-        </p:nvSpPr>
-        <p:spPr>
-          <a:xfrm>
-            <a:off x="201168" y="1024128"/>
-            <a:ext cx="2148840" cy="329184"/>
-          </a:xfrm>
-          <a:prstGeom prst="roundRect">
-            <a:avLst>
-              <a:gd name="adj" fmla="val 8000"/>
-            </a:avLst>
-          </a:prstGeom>
-          <a:solidFill>
-            <a:srgbClr val="E8F5E9"/>
-          </a:solidFill>
-          <a:ln w="6350">
-            <a:solidFill>
-              <a:srgbClr val="1F77B4"/>
-            </a:solidFill>
-          </a:ln>
-        </p:spPr>
-        <p:style>
-          <a:lnRef idx="1">
-            <a:schemeClr val="accent1"/>
-          </a:lnRef>
-          <a:fillRef idx="3">
-            <a:schemeClr val="accent1"/>
-          </a:fillRef>
-          <a:effectRef idx="2">
-            <a:schemeClr val="accent1"/>
-          </a:effectRef>
-          <a:fontRef idx="minor">
-            <a:schemeClr val="lt1"/>
-          </a:fontRef>
-        </p:style>
-        <p:txBody>
-          <a:bodyPr rtlCol="0" anchor="ctr"/>
-          <a:lstStyle/>
-          <a:p>
-            <a:pPr algn="ctr"/>
-          </a:p>
-        </p:txBody>
-      </p:sp>
-      <p:sp>
-        <p:nvSpPr>
-          <p:cNvPr id="8" name="TextBox 7"/>
-          <p:cNvSpPr txBox="1"/>
-          <p:nvPr/>
-        </p:nvSpPr>
-        <p:spPr>
-          <a:xfrm>
-            <a:off x="274320" y="1060704"/>
-            <a:ext cx="2011680" cy="256032"/>
-          </a:xfrm>
-          <a:prstGeom prst="rect">
-            <a:avLst/>
-          </a:prstGeom>
-          <a:noFill/>
-        </p:spPr>
-        <p:txBody>
-          <a:bodyPr wrap="square">
-            <a:spAutoFit/>
-          </a:bodyPr>
-          <a:lstStyle/>
-          <a:p>
-            <a:pPr algn="ctr">
-              <a:spcAft>
-                <a:spcPts val="300"/>
-              </a:spcAft>
-            </a:pPr>
-            <a:r>
-              <a:rPr sz="1200" b="1">
-                <a:solidFill>
-                  <a:srgbClr val="1F77B4"/>
-                </a:solidFill>
-                <a:latin typeface="Calibri"/>
-              </a:rPr>
-              <a:t>YA OPERATIVO</a:t>
-            </a:r>
-          </a:p>
-        </p:txBody>
-      </p:sp>
-      <p:sp>
-        <p:nvSpPr>
-          <p:cNvPr id="9" name="Rounded Rectangle 8"/>
-          <p:cNvSpPr/>
-          <p:nvPr/>
-        </p:nvSpPr>
-        <p:spPr>
-          <a:xfrm>
-            <a:off x="201168" y="1444752"/>
-            <a:ext cx="3840480" cy="987552"/>
-          </a:xfrm>
-          <a:prstGeom prst="roundRect">
-            <a:avLst>
-              <a:gd name="adj" fmla="val 8000"/>
-            </a:avLst>
-          </a:prstGeom>
-          <a:solidFill>
-            <a:srgbClr val="FFFFFF"/>
-          </a:solidFill>
-          <a:ln w="6350">
-            <a:solidFill>
-              <a:srgbClr val="1F77B4"/>
-            </a:solidFill>
-          </a:ln>
-        </p:spPr>
-        <p:style>
-          <a:lnRef idx="1">
-            <a:schemeClr val="accent1"/>
-          </a:lnRef>
-          <a:fillRef idx="3">
-            <a:schemeClr val="accent1"/>
-          </a:fillRef>
-          <a:effectRef idx="2">
-            <a:schemeClr val="accent1"/>
-          </a:effectRef>
-          <a:fontRef idx="minor">
-            <a:schemeClr val="lt1"/>
-          </a:fontRef>
-        </p:style>
-        <p:txBody>
-          <a:bodyPr rtlCol="0" anchor="ctr"/>
-          <a:lstStyle/>
-          <a:p>
-            <a:pPr algn="ctr"/>
-          </a:p>
-        </p:txBody>
-      </p:sp>
-      <p:sp>
-        <p:nvSpPr>
-          <p:cNvPr id="10" name="TextBox 9"/>
-          <p:cNvSpPr txBox="1"/>
-          <p:nvPr/>
-        </p:nvSpPr>
-        <p:spPr>
-          <a:xfrm>
-            <a:off x="310896" y="1517904"/>
-            <a:ext cx="3639312" cy="201168"/>
-          </a:xfrm>
-          <a:prstGeom prst="rect">
-            <a:avLst/>
-          </a:prstGeom>
-          <a:noFill/>
-        </p:spPr>
-        <p:txBody>
-          <a:bodyPr wrap="square">
-            <a:spAutoFit/>
-          </a:bodyPr>
-          <a:lstStyle/>
-          <a:p>
-            <a:pPr algn="l">
-              <a:spcAft>
-                <a:spcPts val="300"/>
-              </a:spcAft>
-            </a:pPr>
-            <a:r>
-              <a:rPr sz="1100" b="1">
-                <a:solidFill>
-                  <a:srgbClr val="5A5A5A"/>
-                </a:solidFill>
-                <a:latin typeface="Calibri"/>
-              </a:rPr>
-              <a:t>Día (mediana)</a:t>
-            </a:r>
-          </a:p>
-        </p:txBody>
-      </p:sp>
-      <p:sp>
-        <p:nvSpPr>
-          <p:cNvPr id="11" name="TextBox 10"/>
-          <p:cNvSpPr txBox="1"/>
-          <p:nvPr/>
-        </p:nvSpPr>
-        <p:spPr>
-          <a:xfrm>
-            <a:off x="310896" y="1737360"/>
-            <a:ext cx="3639312" cy="365760"/>
-          </a:xfrm>
-          <a:prstGeom prst="rect">
-            <a:avLst/>
-          </a:prstGeom>
-          <a:noFill/>
-        </p:spPr>
-        <p:txBody>
-          <a:bodyPr wrap="square">
-            <a:spAutoFit/>
-          </a:bodyPr>
-          <a:lstStyle/>
-          <a:p>
-            <a:pPr algn="l">
-              <a:spcAft>
-                <a:spcPts val="300"/>
-              </a:spcAft>
-            </a:pPr>
-            <a:r>
-              <a:rPr sz="2200" b="1">
-                <a:solidFill>
-                  <a:srgbClr val="0D3B66"/>
-                </a:solidFill>
-                <a:latin typeface="Calibri"/>
-              </a:rPr>
-              <a:t>88 → 28</a:t>
-            </a:r>
-          </a:p>
-        </p:txBody>
-      </p:sp>
-      <p:sp>
-        <p:nvSpPr>
-          <p:cNvPr id="12" name="TextBox 11"/>
-          <p:cNvSpPr txBox="1"/>
-          <p:nvPr/>
-        </p:nvSpPr>
-        <p:spPr>
-          <a:xfrm>
-            <a:off x="310896" y="2121408"/>
-            <a:ext cx="3639312" cy="237744"/>
-          </a:xfrm>
-          <a:prstGeom prst="rect">
-            <a:avLst/>
-          </a:prstGeom>
-          <a:noFill/>
-        </p:spPr>
-        <p:txBody>
-          <a:bodyPr wrap="square">
-            <a:spAutoFit/>
-          </a:bodyPr>
-          <a:lstStyle/>
-          <a:p>
-            <a:pPr algn="l">
-              <a:spcAft>
-                <a:spcPts val="300"/>
-              </a:spcAft>
-            </a:pPr>
-            <a:r>
-              <a:rPr sz="1100" b="0">
-                <a:solidFill>
-                  <a:srgbClr val="5A5A5A"/>
-                </a:solidFill>
-                <a:latin typeface="Calibri"/>
-              </a:rPr>
-              <a:t>m³/día</a:t>
-            </a:r>
-          </a:p>
-        </p:txBody>
-      </p:sp>
-      <p:sp>
-        <p:nvSpPr>
-          <p:cNvPr id="13" name="Rounded Rectangle 12"/>
-          <p:cNvSpPr/>
-          <p:nvPr/>
-        </p:nvSpPr>
-        <p:spPr>
-          <a:xfrm>
-            <a:off x="4169663" y="1444752"/>
-            <a:ext cx="3840480" cy="987552"/>
-          </a:xfrm>
-          <a:prstGeom prst="roundRect">
-            <a:avLst>
-              <a:gd name="adj" fmla="val 8000"/>
-            </a:avLst>
-          </a:prstGeom>
-          <a:solidFill>
-            <a:srgbClr val="FFFFFF"/>
-          </a:solidFill>
-          <a:ln w="6350">
-            <a:solidFill>
-              <a:srgbClr val="1F77B4"/>
-            </a:solidFill>
-          </a:ln>
-        </p:spPr>
-        <p:style>
-          <a:lnRef idx="1">
-            <a:schemeClr val="accent1"/>
-          </a:lnRef>
-          <a:fillRef idx="3">
-            <a:schemeClr val="accent1"/>
-          </a:fillRef>
-          <a:effectRef idx="2">
-            <a:schemeClr val="accent1"/>
-          </a:effectRef>
-          <a:fontRef idx="minor">
-            <a:schemeClr val="lt1"/>
-          </a:fontRef>
-        </p:style>
-        <p:txBody>
-          <a:bodyPr rtlCol="0" anchor="ctr"/>
-          <a:lstStyle/>
-          <a:p>
-            <a:pPr algn="ctr"/>
-          </a:p>
-        </p:txBody>
-      </p:sp>
-      <p:sp>
-        <p:nvSpPr>
-          <p:cNvPr id="14" name="TextBox 13"/>
-          <p:cNvSpPr txBox="1"/>
-          <p:nvPr/>
-        </p:nvSpPr>
-        <p:spPr>
-          <a:xfrm>
-            <a:off x="4279392" y="1517904"/>
-            <a:ext cx="3639312" cy="201168"/>
-          </a:xfrm>
-          <a:prstGeom prst="rect">
-            <a:avLst/>
-          </a:prstGeom>
-          <a:noFill/>
-        </p:spPr>
-        <p:txBody>
-          <a:bodyPr wrap="square">
-            <a:spAutoFit/>
-          </a:bodyPr>
-          <a:lstStyle/>
-          <a:p>
-            <a:pPr algn="l">
-              <a:spcAft>
-                <a:spcPts val="300"/>
-              </a:spcAft>
-            </a:pPr>
-            <a:r>
-              <a:rPr sz="1100" b="1">
-                <a:solidFill>
-                  <a:srgbClr val="5A5A5A"/>
-                </a:solidFill>
-                <a:latin typeface="Calibri"/>
-              </a:rPr>
-              <a:t>Ahorro mensual</a:t>
-            </a:r>
-          </a:p>
-        </p:txBody>
-      </p:sp>
-      <p:sp>
-        <p:nvSpPr>
-          <p:cNvPr id="15" name="TextBox 14"/>
-          <p:cNvSpPr txBox="1"/>
-          <p:nvPr/>
-        </p:nvSpPr>
-        <p:spPr>
-          <a:xfrm>
-            <a:off x="4279392" y="1737360"/>
-            <a:ext cx="3639312" cy="365760"/>
-          </a:xfrm>
-          <a:prstGeom prst="rect">
-            <a:avLst/>
-          </a:prstGeom>
-          <a:noFill/>
-        </p:spPr>
-        <p:txBody>
-          <a:bodyPr wrap="square">
-            <a:spAutoFit/>
-          </a:bodyPr>
-          <a:lstStyle/>
-          <a:p>
-            <a:pPr algn="l">
-              <a:spcAft>
-                <a:spcPts val="300"/>
-              </a:spcAft>
-            </a:pPr>
-            <a:r>
-              <a:rPr sz="2200" b="1">
-                <a:solidFill>
-                  <a:srgbClr val="0D3B66"/>
-                </a:solidFill>
-                <a:latin typeface="Calibri"/>
-              </a:rPr>
-              <a:t>1.826</a:t>
-            </a:r>
-          </a:p>
-        </p:txBody>
-      </p:sp>
-      <p:sp>
-        <p:nvSpPr>
-          <p:cNvPr id="16" name="TextBox 15"/>
-          <p:cNvSpPr txBox="1"/>
-          <p:nvPr/>
-        </p:nvSpPr>
-        <p:spPr>
-          <a:xfrm>
-            <a:off x="4279392" y="2121408"/>
-            <a:ext cx="3639312" cy="237744"/>
-          </a:xfrm>
-          <a:prstGeom prst="rect">
-            <a:avLst/>
-          </a:prstGeom>
-          <a:noFill/>
-        </p:spPr>
-        <p:txBody>
-          <a:bodyPr wrap="square">
-            <a:spAutoFit/>
-          </a:bodyPr>
-          <a:lstStyle/>
-          <a:p>
-            <a:pPr algn="l">
-              <a:spcAft>
-                <a:spcPts val="300"/>
-              </a:spcAft>
-            </a:pPr>
-            <a:r>
-              <a:rPr sz="1100" b="0">
-                <a:solidFill>
-                  <a:srgbClr val="5A5A5A"/>
-                </a:solidFill>
-                <a:latin typeface="Calibri"/>
-              </a:rPr>
-              <a:t>m³/mes</a:t>
-            </a:r>
-          </a:p>
-        </p:txBody>
-      </p:sp>
-      <p:sp>
-        <p:nvSpPr>
-          <p:cNvPr id="17" name="Rounded Rectangle 16"/>
-          <p:cNvSpPr/>
-          <p:nvPr/>
-        </p:nvSpPr>
-        <p:spPr>
-          <a:xfrm>
-            <a:off x="8138159" y="1444752"/>
-            <a:ext cx="3840480" cy="987552"/>
-          </a:xfrm>
-          <a:prstGeom prst="roundRect">
-            <a:avLst>
-              <a:gd name="adj" fmla="val 8000"/>
-            </a:avLst>
-          </a:prstGeom>
-          <a:solidFill>
-            <a:srgbClr val="FFFFFF"/>
-          </a:solidFill>
-          <a:ln w="6350">
-            <a:solidFill>
-              <a:srgbClr val="1F77B4"/>
-            </a:solidFill>
-          </a:ln>
-        </p:spPr>
-        <p:style>
-          <a:lnRef idx="1">
-            <a:schemeClr val="accent1"/>
-          </a:lnRef>
-          <a:fillRef idx="3">
-            <a:schemeClr val="accent1"/>
-          </a:fillRef>
-          <a:effectRef idx="2">
-            <a:schemeClr val="accent1"/>
-          </a:effectRef>
-          <a:fontRef idx="minor">
-            <a:schemeClr val="lt1"/>
-          </a:fontRef>
-        </p:style>
-        <p:txBody>
-          <a:bodyPr rtlCol="0" anchor="ctr"/>
-          <a:lstStyle/>
-          <a:p>
-            <a:pPr algn="ctr"/>
-          </a:p>
-        </p:txBody>
-      </p:sp>
-      <p:sp>
-        <p:nvSpPr>
-          <p:cNvPr id="18" name="TextBox 17"/>
-          <p:cNvSpPr txBox="1"/>
-          <p:nvPr/>
-        </p:nvSpPr>
-        <p:spPr>
-          <a:xfrm>
-            <a:off x="8247887" y="1517904"/>
-            <a:ext cx="3639312" cy="201168"/>
-          </a:xfrm>
-          <a:prstGeom prst="rect">
-            <a:avLst/>
-          </a:prstGeom>
-          <a:noFill/>
-        </p:spPr>
-        <p:txBody>
-          <a:bodyPr wrap="square">
-            <a:spAutoFit/>
-          </a:bodyPr>
-          <a:lstStyle/>
-          <a:p>
-            <a:pPr algn="l">
-              <a:spcAft>
-                <a:spcPts val="300"/>
-              </a:spcAft>
-            </a:pPr>
-            <a:r>
-              <a:rPr sz="1100" b="1">
-                <a:solidFill>
-                  <a:srgbClr val="5A5A5A"/>
-                </a:solidFill>
-                <a:latin typeface="Calibri"/>
-              </a:rPr>
-              <a:t>Ahorro $</a:t>
-            </a:r>
-          </a:p>
-        </p:txBody>
-      </p:sp>
-      <p:sp>
-        <p:nvSpPr>
-          <p:cNvPr id="19" name="TextBox 18"/>
-          <p:cNvSpPr txBox="1"/>
-          <p:nvPr/>
-        </p:nvSpPr>
-        <p:spPr>
-          <a:xfrm>
-            <a:off x="8247887" y="1737360"/>
-            <a:ext cx="3639312" cy="365760"/>
-          </a:xfrm>
-          <a:prstGeom prst="rect">
-            <a:avLst/>
-          </a:prstGeom>
-          <a:noFill/>
-        </p:spPr>
-        <p:txBody>
-          <a:bodyPr wrap="square">
-            <a:spAutoFit/>
-          </a:bodyPr>
-          <a:lstStyle/>
-          <a:p>
-            <a:pPr algn="l">
-              <a:spcAft>
-                <a:spcPts val="300"/>
-              </a:spcAft>
-            </a:pPr>
-            <a:r>
-              <a:rPr sz="2200" b="1">
-                <a:solidFill>
-                  <a:srgbClr val="0D3B66"/>
-                </a:solidFill>
-                <a:latin typeface="Calibri"/>
-              </a:rPr>
-              <a:t>$2.555.700</a:t>
-            </a:r>
-          </a:p>
-        </p:txBody>
-      </p:sp>
-      <p:sp>
-        <p:nvSpPr>
-          <p:cNvPr id="20" name="TextBox 19"/>
-          <p:cNvSpPr txBox="1"/>
-          <p:nvPr/>
-        </p:nvSpPr>
-        <p:spPr>
-          <a:xfrm>
-            <a:off x="8247887" y="2121408"/>
-            <a:ext cx="3639312" cy="237744"/>
-          </a:xfrm>
-          <a:prstGeom prst="rect">
-            <a:avLst/>
-          </a:prstGeom>
-          <a:noFill/>
-        </p:spPr>
-        <p:txBody>
-          <a:bodyPr wrap="square">
-            <a:spAutoFit/>
-          </a:bodyPr>
-          <a:lstStyle/>
-          <a:p>
-            <a:pPr algn="l">
-              <a:spcAft>
-                <a:spcPts val="300"/>
-              </a:spcAft>
-            </a:pPr>
-            <a:r>
-              <a:rPr sz="1100" b="0">
-                <a:solidFill>
-                  <a:srgbClr val="5A5A5A"/>
-                </a:solidFill>
-                <a:latin typeface="Calibri"/>
-              </a:rPr>
-              <a:t>tarifa $1.400/m³</a:t>
+              <a:t>Proyección 00:30 → cero  ·  tarifa $1.400/m³  ·  08/09/2026</a:t>
             </a:r>
           </a:p>
         </p:txBody>
       </p:sp>
       <p:pic>
         <p:nvPicPr>
-          <p:cNvPr id="21" name="Picture 20" descr="sur.png"/>
+          <p:cNvPr id="7" name="Picture 6" descr="futuros_puntos_control.png"/>
           <p:cNvPicPr>
             <a:picLocks noChangeAspect="1"/>
           </p:cNvPicPr>
@@ -4120,8 +4390,8 @@
         </p:blipFill>
         <p:spPr>
           <a:xfrm>
-            <a:off x="201168" y="2578608"/>
-            <a:ext cx="11777472" cy="3353461"/>
+            <a:off x="320040" y="1234440"/>
+            <a:ext cx="11521440" cy="4659782"/>
           </a:xfrm>
           <a:prstGeom prst="rect">
             <a:avLst/>
@@ -4130,39 +4400,39 @@
       </p:pic>
       <p:sp>
         <p:nvSpPr>
-          <p:cNvPr id="22" name="TextBox 21"/>
-          <p:cNvSpPr txBox="1"/>
-          <p:nvPr/>
-        </p:nvSpPr>
-        <p:spPr>
-          <a:xfrm>
-            <a:off x="256032" y="6510528"/>
-            <a:ext cx="11612880" cy="256032"/>
-          </a:xfrm>
-          <a:prstGeom prst="rect">
-            <a:avLst/>
-          </a:prstGeom>
-          <a:noFill/>
-        </p:spPr>
-        <p:txBody>
-          <a:bodyPr wrap="square">
-            <a:spAutoFit/>
-          </a:bodyPr>
-          <a:lstStyle/>
-          <a:p>
-            <a:pPr algn="l">
-              <a:spcAft>
-                <a:spcPts val="300"/>
-              </a:spcAft>
-            </a:pPr>
-            <a:r>
-              <a:rPr sz="1100" b="0">
+          <p:cNvPr id="8" name="TextBox 7"/>
+          <p:cNvSpPr txBox="1"/>
+          <p:nvPr/>
+        </p:nvSpPr>
+        <p:spPr>
+          <a:xfrm>
+            <a:off x="256032" y="6473952"/>
+            <a:ext cx="11612880" cy="201168"/>
+          </a:xfrm>
+          <a:prstGeom prst="rect">
+            <a:avLst/>
+          </a:prstGeom>
+          <a:noFill/>
+        </p:spPr>
+        <p:txBody>
+          <a:bodyPr wrap="square">
+            <a:spAutoFit/>
+          </a:bodyPr>
+          <a:lstStyle/>
+          <a:p>
+            <a:pPr algn="ctr">
+              <a:spcAft>
+                <a:spcPts val="300"/>
+              </a:spcAft>
+            </a:pPr>
+            <a:r>
+              <a:rPr sz="1200" b="0">
                 <a:solidFill>
                   <a:srgbClr val="5A5A5A"/>
                 </a:solidFill>
                 <a:latin typeface="Calibri"/>
               </a:rPr>
-              <a:t>No es on/off: se reparó la fuga. De madrugada el caudal casi desaparece; de día baja a menos de la mitad.</a:t>
+              <a:t>Estanque Sur no entra (no es control WES). DL Kennedy no se propone.</a:t>
             </a:r>
           </a:p>
         </p:txBody>
@@ -4329,7 +4599,7 @@
                 </a:solidFill>
                 <a:latin typeface="Calibri"/>
               </a:rPr>
-              <a:t>MAE  ·  Estanque Norte</a:t>
+              <a:t>MAE  ·  Estanque Sur</a:t>
             </a:r>
           </a:p>
         </p:txBody>
@@ -4368,7 +4638,7 @@
                 </a:solidFill>
                 <a:latin typeface="Calibri"/>
               </a:rPr>
-              <a:t>On/off desde el 05/08  ·  corte 00:30  ·  000025-01  ·  08/09/2026</a:t>
+              <a:t>Presostato al relocalizar 10/06  ·  000025-19  ·  08/09/2026</a:t>
             </a:r>
           </a:p>
         </p:txBody>
@@ -4382,7 +4652,7 @@
         <p:spPr>
           <a:xfrm>
             <a:off x="201168" y="1024128"/>
-            <a:ext cx="2148840" cy="329184"/>
+            <a:ext cx="2331720" cy="329184"/>
           </a:xfrm>
           <a:prstGeom prst="roundRect">
             <a:avLst>
@@ -4390,11 +4660,11 @@
             </a:avLst>
           </a:prstGeom>
           <a:solidFill>
-            <a:srgbClr val="E8F5E9"/>
+            <a:srgbClr val="F5F7FA"/>
           </a:solidFill>
           <a:ln w="6350">
             <a:solidFill>
-              <a:srgbClr val="1F77B4"/>
+              <a:srgbClr val="5A5A5A"/>
             </a:solidFill>
           </a:ln>
         </p:spPr>
@@ -4429,7 +4699,7 @@
         <p:spPr>
           <a:xfrm>
             <a:off x="274320" y="1060704"/>
-            <a:ext cx="2011680" cy="256032"/>
+            <a:ext cx="2194560" cy="256032"/>
           </a:xfrm>
           <a:prstGeom prst="rect">
             <a:avLst/>
@@ -4450,11 +4720,11 @@
             <a:r>
               <a:rPr sz="1200" b="1">
                 <a:solidFill>
-                  <a:srgbClr val="1F77B4"/>
-                </a:solidFill>
-                <a:latin typeface="Calibri"/>
-              </a:rPr>
-              <a:t>YA OPERATIVO</a:t>
+                  <a:srgbClr val="5A5A5A"/>
+                </a:solidFill>
+                <a:latin typeface="Calibri"/>
+              </a:rPr>
+              <a:t>CONTEXTO</a:t>
             </a:r>
           </a:p>
         </p:txBody>
@@ -4480,7 +4750,7 @@
           </a:solidFill>
           <a:ln w="6350">
             <a:solidFill>
-              <a:srgbClr val="1F77B4"/>
+              <a:srgbClr val="5A5A5A"/>
             </a:solidFill>
           </a:ln>
         </p:spPr>
@@ -4540,7 +4810,7 @@
                 </a:solidFill>
                 <a:latin typeface="Calibri"/>
               </a:rPr>
-              <a:t>Noche desde 00:30</a:t>
+              <a:t>Día (mediana)</a:t>
             </a:r>
           </a:p>
         </p:txBody>
@@ -4579,7 +4849,7 @@
                 </a:solidFill>
                 <a:latin typeface="Calibri"/>
               </a:rPr>
-              <a:t>4,8 → 0</a:t>
+              <a:t>88 → 28</a:t>
             </a:r>
           </a:p>
         </p:txBody>
@@ -4618,7 +4888,7 @@
                 </a:solidFill>
                 <a:latin typeface="Calibri"/>
               </a:rPr>
-              <a:t>m³/noche</a:t>
+              <a:t>m³/día</a:t>
             </a:r>
           </a:p>
         </p:txBody>
@@ -4644,7 +4914,7 @@
           </a:solidFill>
           <a:ln w="6350">
             <a:solidFill>
-              <a:srgbClr val="1F77B4"/>
+              <a:srgbClr val="5A5A5A"/>
             </a:solidFill>
           </a:ln>
         </p:spPr>
@@ -4704,7 +4974,7 @@
                 </a:solidFill>
                 <a:latin typeface="Calibri"/>
               </a:rPr>
-              <a:t>Ahorro mensual</a:t>
+              <a:t>Baja observada</a:t>
             </a:r>
           </a:p>
         </p:txBody>
@@ -4743,7 +5013,7 @@
                 </a:solidFill>
                 <a:latin typeface="Calibri"/>
               </a:rPr>
-              <a:t>113</a:t>
+              <a:t>1.826</a:t>
             </a:r>
           </a:p>
         </p:txBody>
@@ -4782,7 +5052,7 @@
                 </a:solidFill>
                 <a:latin typeface="Calibri"/>
               </a:rPr>
-              <a:t>m³/mes</a:t>
+              <a:t>m³/mes · no entra en $</a:t>
             </a:r>
           </a:p>
         </p:txBody>
@@ -4808,7 +5078,7 @@
           </a:solidFill>
           <a:ln w="6350">
             <a:solidFill>
-              <a:srgbClr val="1F77B4"/>
+              <a:srgbClr val="5A5A5A"/>
             </a:solidFill>
           </a:ln>
         </p:spPr>
@@ -4868,7 +5138,7 @@
                 </a:solidFill>
                 <a:latin typeface="Calibri"/>
               </a:rPr>
-              <a:t>Ahorro $</a:t>
+              <a:t>Por qué no suma</a:t>
             </a:r>
           </a:p>
         </p:txBody>
@@ -4907,7 +5177,7 @@
                 </a:solidFill>
                 <a:latin typeface="Calibri"/>
               </a:rPr>
-              <a:t>$157.920</a:t>
+              <a:t>No es control WES</a:t>
             </a:r>
           </a:p>
         </p:txBody>
@@ -4946,14 +5216,14 @@
                 </a:solidFill>
                 <a:latin typeface="Calibri"/>
               </a:rPr>
-              <a:t>01:00–05:00 en cero</a:t>
+              <a:t>mejora de presostato</a:t>
             </a:r>
           </a:p>
         </p:txBody>
       </p:sp>
       <p:pic>
         <p:nvPicPr>
-          <p:cNvPr id="21" name="Picture 20" descr="norte.png"/>
+          <p:cNvPr id="21" name="Picture 20" descr="sur.png"/>
           <p:cNvPicPr>
             <a:picLocks noChangeAspect="1"/>
           </p:cNvPicPr>
@@ -5009,7 +5279,7 @@
                 </a:solidFill>
                 <a:latin typeface="Calibri"/>
               </a:rPr>
-              <a:t>Dorado = noches con 01:00–05:00 en cero. Lo de 00:00–00:30 no es noche y no se resta del $.</a:t>
+              <a:t>Al cambiar la ubicación se mejoró el presostato. El gráfico queda para explicar el antes/después. No es on/off de WES y no entra en la sumatoria.</a:t>
             </a:r>
           </a:p>
         </p:txBody>
@@ -5176,7 +5446,7 @@
                 </a:solidFill>
                 <a:latin typeface="Calibri"/>
               </a:rPr>
-              <a:t>BOM  ·  San Ignacio 500</a:t>
+              <a:t>MAE  ·  Estanque Norte</a:t>
             </a:r>
           </a:p>
         </p:txBody>
@@ -5215,7 +5485,7 @@
                 </a:solidFill>
                 <a:latin typeface="Calibri"/>
               </a:rPr>
-              <a:t>On/off desde el 17/07  ·  corte 00:30  ·  000025-18  ·  08/09/2026</a:t>
+              <a:t>On/off desde el 05/08  ·  corte 00:30  ·  000025-01  ·  08/09/2026</a:t>
             </a:r>
           </a:p>
         </p:txBody>
@@ -5229,7 +5499,7 @@
         <p:spPr>
           <a:xfrm>
             <a:off x="201168" y="1024128"/>
-            <a:ext cx="2148840" cy="329184"/>
+            <a:ext cx="2331720" cy="329184"/>
           </a:xfrm>
           <a:prstGeom prst="roundRect">
             <a:avLst>
@@ -5276,7 +5546,7 @@
         <p:spPr>
           <a:xfrm>
             <a:off x="274320" y="1060704"/>
-            <a:ext cx="2011680" cy="256032"/>
+            <a:ext cx="2194560" cy="256032"/>
           </a:xfrm>
           <a:prstGeom prst="rect">
             <a:avLst/>
@@ -5426,7 +5696,7 @@
                 </a:solidFill>
                 <a:latin typeface="Calibri"/>
               </a:rPr>
-              <a:t>31,7 → 0</a:t>
+              <a:t>4,8 → 0</a:t>
             </a:r>
           </a:p>
         </p:txBody>
@@ -5590,7 +5860,7 @@
                 </a:solidFill>
                 <a:latin typeface="Calibri"/>
               </a:rPr>
-              <a:t>886</a:t>
+              <a:t>113</a:t>
             </a:r>
           </a:p>
         </p:txBody>
@@ -5754,7 +6024,7 @@
                 </a:solidFill>
                 <a:latin typeface="Calibri"/>
               </a:rPr>
-              <a:t>$1.241.100</a:t>
+              <a:t>$157.920</a:t>
             </a:r>
           </a:p>
         </p:txBody>
@@ -5793,14 +6063,14 @@
                 </a:solidFill>
                 <a:latin typeface="Calibri"/>
               </a:rPr>
-              <a:t>umbral 24 h 145 m³/día</a:t>
+              <a:t>01:00–05:00 en cero</a:t>
             </a:r>
           </a:p>
         </p:txBody>
       </p:sp>
       <p:pic>
         <p:nvPicPr>
-          <p:cNvPr id="21" name="Picture 20" descr="si500.png"/>
+          <p:cNvPr id="21" name="Picture 20" descr="norte.png"/>
           <p:cNvPicPr>
             <a:picLocks noChangeAspect="1"/>
           </p:cNvPicPr>
@@ -5856,7 +6126,7 @@
                 </a:solidFill>
                 <a:latin typeface="Calibri"/>
               </a:rPr>
-              <a:t>Antes ~5,8 m³/h toda la noche. Con control: 01:00–05:00 en cero. El tramo 00:00–00:30 no se resta.</a:t>
+              <a:t>Dorado = noches con 01:00–05:00 en cero. Lo de 00:00–00:30 no es noche y no se resta del $.</a:t>
             </a:r>
           </a:p>
         </p:txBody>
@@ -6023,7 +6293,7 @@
                 </a:solidFill>
                 <a:latin typeface="Calibri"/>
               </a:rPr>
-              <a:t>MAQ  ·  Matriz Principal</a:t>
+              <a:t>BOM  ·  San Ignacio 500</a:t>
             </a:r>
           </a:p>
         </p:txBody>
@@ -6062,7 +6332,7 @@
                 </a:solidFill>
                 <a:latin typeface="Calibri"/>
               </a:rPr>
-              <a:t>A copiar  ·  mismo corte 00:30  ·  000025-13  ·  umbral 240 m³/día</a:t>
+              <a:t>On/off desde el 17/07  ·  corte 00:30  ·  000025-18  ·  08/09/2026</a:t>
             </a:r>
           </a:p>
         </p:txBody>
@@ -6076,7 +6346,7 @@
         <p:spPr>
           <a:xfrm>
             <a:off x="201168" y="1024128"/>
-            <a:ext cx="2148840" cy="329184"/>
+            <a:ext cx="2331720" cy="329184"/>
           </a:xfrm>
           <a:prstGeom prst="roundRect">
             <a:avLst>
@@ -6084,11 +6354,11 @@
             </a:avLst>
           </a:prstGeom>
           <a:solidFill>
-            <a:srgbClr val="FFF9EB"/>
+            <a:srgbClr val="E8F5E9"/>
           </a:solidFill>
           <a:ln w="6350">
             <a:solidFill>
-              <a:srgbClr val="C9A227"/>
+              <a:srgbClr val="1F77B4"/>
             </a:solidFill>
           </a:ln>
         </p:spPr>
@@ -6123,7 +6393,7 @@
         <p:spPr>
           <a:xfrm>
             <a:off x="274320" y="1060704"/>
-            <a:ext cx="2011680" cy="256032"/>
+            <a:ext cx="2194560" cy="256032"/>
           </a:xfrm>
           <a:prstGeom prst="rect">
             <a:avLst/>
@@ -6144,11 +6414,11 @@
             <a:r>
               <a:rPr sz="1200" b="1">
                 <a:solidFill>
-                  <a:srgbClr val="C9A227"/>
-                </a:solidFill>
-                <a:latin typeface="Calibri"/>
-              </a:rPr>
-              <a:t>A PROPONER</a:t>
+                  <a:srgbClr val="1F77B4"/>
+                </a:solidFill>
+                <a:latin typeface="Calibri"/>
+              </a:rPr>
+              <a:t>YA OPERATIVO</a:t>
             </a:r>
           </a:p>
         </p:txBody>
@@ -6174,7 +6444,7 @@
           </a:solidFill>
           <a:ln w="6350">
             <a:solidFill>
-              <a:srgbClr val="C9A227"/>
+              <a:srgbClr val="1F77B4"/>
             </a:solidFill>
           </a:ln>
         </p:spPr>
@@ -6234,7 +6504,7 @@
                 </a:solidFill>
                 <a:latin typeface="Calibri"/>
               </a:rPr>
-              <a:t>Noche típica</a:t>
+              <a:t>Noche desde 00:30</a:t>
             </a:r>
           </a:p>
         </p:txBody>
@@ -6273,7 +6543,7 @@
                 </a:solidFill>
                 <a:latin typeface="Calibri"/>
               </a:rPr>
-              <a:t>21,1 → 0</a:t>
+              <a:t>31,7 → 0</a:t>
             </a:r>
           </a:p>
         </p:txBody>
@@ -6312,7 +6582,7 @@
                 </a:solidFill>
                 <a:latin typeface="Calibri"/>
               </a:rPr>
-              <a:t>m³ desde 00:30</a:t>
+              <a:t>m³/noche</a:t>
             </a:r>
           </a:p>
         </p:txBody>
@@ -6338,7 +6608,7 @@
           </a:solidFill>
           <a:ln w="6350">
             <a:solidFill>
-              <a:srgbClr val="C9A227"/>
+              <a:srgbClr val="1F77B4"/>
             </a:solidFill>
           </a:ln>
         </p:spPr>
@@ -6398,7 +6668,7 @@
                 </a:solidFill>
                 <a:latin typeface="Calibri"/>
               </a:rPr>
-              <a:t>Proyección</a:t>
+              <a:t>Ahorro mensual</a:t>
             </a:r>
           </a:p>
         </p:txBody>
@@ -6437,7 +6707,7 @@
                 </a:solidFill>
                 <a:latin typeface="Calibri"/>
               </a:rPr>
-              <a:t>634</a:t>
+              <a:t>886</a:t>
             </a:r>
           </a:p>
         </p:txBody>
@@ -6502,7 +6772,7 @@
           </a:solidFill>
           <a:ln w="6350">
             <a:solidFill>
-              <a:srgbClr val="C9A227"/>
+              <a:srgbClr val="1F77B4"/>
             </a:solidFill>
           </a:ln>
         </p:spPr>
@@ -6562,7 +6832,7 @@
                 </a:solidFill>
                 <a:latin typeface="Calibri"/>
               </a:rPr>
-              <a:t>Proyección $</a:t>
+              <a:t>Ahorro $</a:t>
             </a:r>
           </a:p>
         </p:txBody>
@@ -6601,7 +6871,7 @@
                 </a:solidFill>
                 <a:latin typeface="Calibri"/>
               </a:rPr>
-              <a:t>$887.040</a:t>
+              <a:t>$1.241.100</a:t>
             </a:r>
           </a:p>
         </p:txBody>
@@ -6640,14 +6910,14 @@
                 </a:solidFill>
                 <a:latin typeface="Calibri"/>
               </a:rPr>
-              <a:t>si se aprueba el on/off</a:t>
+              <a:t>umbral 24 h 145 m³/día</a:t>
             </a:r>
           </a:p>
         </p:txBody>
       </p:sp>
       <p:pic>
         <p:nvPicPr>
-          <p:cNvPr id="21" name="Picture 20" descr="maq.png"/>
+          <p:cNvPr id="21" name="Picture 20" descr="si500.png"/>
           <p:cNvPicPr>
             <a:picLocks noChangeAspect="1"/>
           </p:cNvPicPr>
@@ -6703,7 +6973,7 @@
                 </a:solidFill>
                 <a:latin typeface="Calibri"/>
               </a:rPr>
-              <a:t>La Matriz concentra Quilicura. Desde el 22/06 el día se duplicó. Meta: esa noche a cero, igual que Norte y SI500.</a:t>
+              <a:t>Antes ~5,8 m³/h toda la noche. Con control: 01:00–05:00 en cero. El tramo 00:00–00:30 no se resta.</a:t>
             </a:r>
           </a:p>
         </p:txBody>
@@ -6870,7 +7140,7 @@
                 </a:solidFill>
                 <a:latin typeface="Calibri"/>
               </a:rPr>
-              <a:t>PAK  ·  Bazar Gourmet</a:t>
+              <a:t>MAQ  ·  Matriz Principal</a:t>
             </a:r>
           </a:p>
         </p:txBody>
@@ -6909,7 +7179,7 @@
                 </a:solidFill>
                 <a:latin typeface="Calibri"/>
               </a:rPr>
-              <a:t>A copiar  ·  corte 00:30 en Bazar (no las Sandías)  ·  000025-35  ·  umbral 250 m³/día</a:t>
+              <a:t>A copiar  ·  mismo corte 00:30  ·  000025-13  ·  umbral 240 m³/día</a:t>
             </a:r>
           </a:p>
         </p:txBody>
@@ -6923,7 +7193,7 @@
         <p:spPr>
           <a:xfrm>
             <a:off x="201168" y="1024128"/>
-            <a:ext cx="2148840" cy="329184"/>
+            <a:ext cx="2331720" cy="329184"/>
           </a:xfrm>
           <a:prstGeom prst="roundRect">
             <a:avLst>
@@ -6970,7 +7240,7 @@
         <p:spPr>
           <a:xfrm>
             <a:off x="274320" y="1060704"/>
-            <a:ext cx="2011680" cy="256032"/>
+            <a:ext cx="2194560" cy="256032"/>
           </a:xfrm>
           <a:prstGeom prst="rect">
             <a:avLst/>
@@ -7120,7 +7390,7 @@
                 </a:solidFill>
                 <a:latin typeface="Calibri"/>
               </a:rPr>
-              <a:t>29,1 → 0</a:t>
+              <a:t>21,1 → 0</a:t>
             </a:r>
           </a:p>
         </p:txBody>
@@ -7284,7 +7554,7 @@
                 </a:solidFill>
                 <a:latin typeface="Calibri"/>
               </a:rPr>
-              <a:t>874</a:t>
+              <a:t>634</a:t>
             </a:r>
           </a:p>
         </p:txBody>
@@ -7448,7 +7718,7 @@
                 </a:solidFill>
                 <a:latin typeface="Calibri"/>
               </a:rPr>
-              <a:t>$1.224.300</a:t>
+              <a:t>$887.040</a:t>
             </a:r>
           </a:p>
         </p:txBody>
@@ -7487,14 +7757,14 @@
                 </a:solidFill>
                 <a:latin typeface="Calibri"/>
               </a:rPr>
-              <a:t>eslabón de mayor noche</a:t>
+              <a:t>si se aprueba el on/off</a:t>
             </a:r>
           </a:p>
         </p:txBody>
       </p:sp>
       <p:pic>
         <p:nvPicPr>
-          <p:cNvPr id="21" name="Picture 20" descr="bazar.png"/>
+          <p:cNvPr id="21" name="Picture 20" descr="maq.png"/>
           <p:cNvPicPr>
             <a:picLocks noChangeAspect="1"/>
           </p:cNvPicPr>
@@ -7550,7 +7820,7 @@
                 </a:solidFill>
                 <a:latin typeface="Calibri"/>
               </a:rPr>
-              <a:t>Cortar en Bazar, no en las Sandías: las Sandías alimentan toda la cadena DL. Umbral DL 390 · Bazar 250 · DL Kennedy 20.</a:t>
+              <a:t>La Matriz concentra Quilicura. Desde el 22/06 el día se duplicó. Meta: esa noche a cero, igual que Norte y SI500.</a:t>
             </a:r>
           </a:p>
         </p:txBody>
@@ -7717,7 +7987,7 @@
                 </a:solidFill>
                 <a:latin typeface="Calibri"/>
               </a:rPr>
-              <a:t>PAK  ·  DL Kennedy</a:t>
+              <a:t>PAK  ·  Bazar Gourmet</a:t>
             </a:r>
           </a:p>
         </p:txBody>
@@ -7756,7 +8026,7 @@
                 </a:solidFill>
                 <a:latin typeface="Calibri"/>
               </a:rPr>
-              <a:t>A copiar  ·  corte 00:30  ·  000025-36  ·  umbral 20 m³/día</a:t>
+              <a:t>A copiar  ·  corte 00:30 en Bazar (no las Sandías)  ·  000025-35  ·  umbral 250 m³/día</a:t>
             </a:r>
           </a:p>
         </p:txBody>
@@ -7770,7 +8040,7 @@
         <p:spPr>
           <a:xfrm>
             <a:off x="201168" y="1024128"/>
-            <a:ext cx="2148840" cy="329184"/>
+            <a:ext cx="2331720" cy="329184"/>
           </a:xfrm>
           <a:prstGeom prst="roundRect">
             <a:avLst>
@@ -7817,7 +8087,7 @@
         <p:spPr>
           <a:xfrm>
             <a:off x="274320" y="1060704"/>
-            <a:ext cx="2011680" cy="256032"/>
+            <a:ext cx="2194560" cy="256032"/>
           </a:xfrm>
           <a:prstGeom prst="rect">
             <a:avLst/>
@@ -7967,7 +8237,7 @@
                 </a:solidFill>
                 <a:latin typeface="Calibri"/>
               </a:rPr>
-              <a:t>0,9 → 0</a:t>
+              <a:t>29,1 → 0</a:t>
             </a:r>
           </a:p>
         </p:txBody>
@@ -8131,7 +8401,7 @@
                 </a:solidFill>
                 <a:latin typeface="Calibri"/>
               </a:rPr>
-              <a:t>27</a:t>
+              <a:t>874</a:t>
             </a:r>
           </a:p>
         </p:txBody>
@@ -8295,7 +8565,7 @@
                 </a:solidFill>
                 <a:latin typeface="Calibri"/>
               </a:rPr>
-              <a:t>$37.800</a:t>
+              <a:t>$1.224.300</a:t>
             </a:r>
           </a:p>
         </p:txBody>
@@ -8334,14 +8604,14 @@
                 </a:solidFill>
                 <a:latin typeface="Calibri"/>
               </a:rPr>
-              <a:t>ramal que sale de DL</a:t>
+              <a:t>eslabón de mayor noche</a:t>
             </a:r>
           </a:p>
         </p:txBody>
       </p:sp>
       <p:pic>
         <p:nvPicPr>
-          <p:cNvPr id="21" name="Picture 20" descr="dl_kennedy.png"/>
+          <p:cNvPr id="21" name="Picture 20" descr="bazar.png"/>
           <p:cNvPicPr>
             <a:picLocks noChangeAspect="1"/>
           </p:cNvPicPr>
@@ -8397,7 +8667,7 @@
                 </a:solidFill>
                 <a:latin typeface="Calibri"/>
               </a:rPr>
-              <a:t>Noche chica (0,9 m³) pero entra en la simulación. Mismo corte que Bazar; no se tocan las Sandías.</a:t>
+              <a:t>Cortar en Bazar, no en las Sandías: las Sandías alimentan toda la cadena DL. DL Kennedy no se propone.</a:t>
             </a:r>
           </a:p>
         </p:txBody>
@@ -8564,7 +8834,7 @@
                 </a:solidFill>
                 <a:latin typeface="Calibri"/>
               </a:rPr>
-              <a:t>AEB  ·  Matriz 1° piso</a:t>
+              <a:t>PAK  ·  Andén 3-4 Matriz</a:t>
             </a:r>
           </a:p>
         </p:txBody>
@@ -8603,7 +8873,7 @@
                 </a:solidFill>
                 <a:latin typeface="Calibri"/>
               </a:rPr>
-              <a:t>A copiar  ·  corte 00:30  ·  000025-11  ·  umbral 75 m³/día</a:t>
+              <a:t>A copiar  ·  corte 00:30  ·  000025-20  ·  umbral 125 m³/día</a:t>
             </a:r>
           </a:p>
         </p:txBody>
@@ -8617,7 +8887,7 @@
         <p:spPr>
           <a:xfrm>
             <a:off x="201168" y="1024128"/>
-            <a:ext cx="2148840" cy="329184"/>
+            <a:ext cx="2331720" cy="329184"/>
           </a:xfrm>
           <a:prstGeom prst="roundRect">
             <a:avLst>
@@ -8664,7 +8934,7 @@
         <p:spPr>
           <a:xfrm>
             <a:off x="274320" y="1060704"/>
-            <a:ext cx="2011680" cy="256032"/>
+            <a:ext cx="2194560" cy="256032"/>
           </a:xfrm>
           <a:prstGeom prst="rect">
             <a:avLst/>
@@ -8814,7 +9084,7 @@
                 </a:solidFill>
                 <a:latin typeface="Calibri"/>
               </a:rPr>
-              <a:t>6,8 → 0</a:t>
+              <a:t>6 → 0</a:t>
             </a:r>
           </a:p>
         </p:txBody>
@@ -8978,7 +9248,7 @@
                 </a:solidFill>
                 <a:latin typeface="Calibri"/>
               </a:rPr>
-              <a:t>205</a:t>
+              <a:t>178</a:t>
             </a:r>
           </a:p>
         </p:txBody>
@@ -9142,7 +9412,7 @@
                 </a:solidFill>
                 <a:latin typeface="Calibri"/>
               </a:rPr>
-              <a:t>$286.860</a:t>
+              <a:t>$249.900</a:t>
             </a:r>
           </a:p>
         </p:txBody>
@@ -9181,14 +9451,14 @@
                 </a:solidFill>
                 <a:latin typeface="Calibri"/>
               </a:rPr>
-              <a:t>Anillo Plaza no entra en $</a:t>
+              <a:t>cabecera del Andén</a:t>
             </a:r>
           </a:p>
         </p:txBody>
       </p:sp>
       <p:pic>
         <p:nvPicPr>
-          <p:cNvPr id="21" name="Picture 20" descr="aeb.png"/>
+          <p:cNvPr id="21" name="Picture 20" descr="anden.png"/>
           <p:cNvPicPr>
             <a:picLocks noChangeAspect="1"/>
           </p:cNvPicPr>
@@ -9244,7 +9514,7 @@
                 </a:solidFill>
                 <a:latin typeface="Calibri"/>
               </a:rPr>
-              <a:t>Matriz A.A. desactivada 15/05: el caudal de noche está en el primer piso. Anillo Plaza queda con umbral de día, sin $.</a:t>
+              <a:t>Matriz del Andén 3-4: alimenta Locales Gast. y Restaurante. No se propone DL Kennedy. Sandías no se tocan.</a:t>
             </a:r>
           </a:p>
         </p:txBody>
@@ -9411,7 +9681,7 @@
                 </a:solidFill>
                 <a:latin typeface="Calibri"/>
               </a:rPr>
-              <a:t>MAM  ·  Falabella</a:t>
+              <a:t>AEB  ·  Matriz 1° piso</a:t>
             </a:r>
           </a:p>
         </p:txBody>
@@ -9450,7 +9720,7 @@
                 </a:solidFill>
                 <a:latin typeface="Calibri"/>
               </a:rPr>
-              <a:t>A copiar  ·  corte 00:30  ·  000025-09  ·  umbral 140 m³/día  ·  mall sale por Falabella desde 15/08</a:t>
+              <a:t>A copiar  ·  corte 00:30  ·  000025-11  ·  umbral 75 m³/día</a:t>
             </a:r>
           </a:p>
         </p:txBody>
@@ -9464,7 +9734,7 @@
         <p:spPr>
           <a:xfrm>
             <a:off x="201168" y="1024128"/>
-            <a:ext cx="2148840" cy="329184"/>
+            <a:ext cx="2331720" cy="329184"/>
           </a:xfrm>
           <a:prstGeom prst="roundRect">
             <a:avLst>
@@ -9511,7 +9781,7 @@
         <p:spPr>
           <a:xfrm>
             <a:off x="274320" y="1060704"/>
-            <a:ext cx="2011680" cy="256032"/>
+            <a:ext cx="2194560" cy="256032"/>
           </a:xfrm>
           <a:prstGeom prst="rect">
             <a:avLst/>
@@ -9661,7 +9931,7 @@
                 </a:solidFill>
                 <a:latin typeface="Calibri"/>
               </a:rPr>
-              <a:t>8,3 → 0</a:t>
+              <a:t>6,8 → 0</a:t>
             </a:r>
           </a:p>
         </p:txBody>
@@ -9825,7 +10095,7 @@
                 </a:solidFill>
                 <a:latin typeface="Calibri"/>
               </a:rPr>
-              <a:t>249</a:t>
+              <a:t>205</a:t>
             </a:r>
           </a:p>
         </p:txBody>
@@ -9989,7 +10259,7 @@
                 </a:solidFill>
                 <a:latin typeface="Calibri"/>
               </a:rPr>
-              <a:t>$348.390</a:t>
+              <a:t>$286.860</a:t>
             </a:r>
           </a:p>
         </p:txBody>
@@ -10028,14 +10298,14 @@
                 </a:solidFill>
                 <a:latin typeface="Calibri"/>
               </a:rPr>
-              <a:t>solo noches con caudal</a:t>
+              <a:t>Anillo Plaza no entra en $</a:t>
             </a:r>
           </a:p>
         </p:txBody>
       </p:sp>
       <p:pic>
         <p:nvPicPr>
-          <p:cNvPr id="21" name="Picture 20" descr="falabella.png"/>
+          <p:cNvPr id="21" name="Picture 20" descr="aeb.png"/>
           <p:cNvPicPr>
             <a:picLocks noChangeAspect="1"/>
           </p:cNvPicPr>
@@ -10091,7 +10361,7 @@
                 </a:solidFill>
                 <a:latin typeface="Calibri"/>
               </a:rPr>
-              <a:t>Placa y Falabella son alimentación alternativa, no dos fallas. Arrow + punto 6 (Pasillo 2) sigue pendiente con Don Miguel.</a:t>
+              <a:t>Matriz A.A. desactivada 15/05: el caudal de noche está en el primer piso. Anillo Plaza queda con umbral de día, sin $.</a:t>
             </a:r>
           </a:p>
         </p:txBody>

--- a/reports/Parque_Arauco/CONSOLIDADO/Fichas_onepage_PA_20260908.pptx
+++ b/reports/Parque_Arauco/CONSOLIDADO/Fichas_onepage_PA_20260908.pptx
@@ -4391,7 +4391,7 @@
         <p:spPr>
           <a:xfrm>
             <a:off x="320040" y="1234440"/>
-            <a:ext cx="11521440" cy="4659782"/>
+            <a:ext cx="11521440" cy="5006981"/>
           </a:xfrm>
           <a:prstGeom prst="rect">
             <a:avLst/>

--- a/reports/Parque_Arauco/CONSOLIDADO/Fichas_onepage_PA_20260908.pptx
+++ b/reports/Parque_Arauco/CONSOLIDADO/Fichas_onepage_PA_20260908.pptx
@@ -4330,7 +4330,7 @@
                 </a:solidFill>
                 <a:latin typeface="Calibri"/>
               </a:rPr>
-              <a:t>Futuros puntos de control</a:t>
+              <a:t>Proyección: ya operativo y a copiar</a:t>
             </a:r>
           </a:p>
         </p:txBody>
@@ -4369,7 +4369,7 @@
                 </a:solidFill>
                 <a:latin typeface="Calibri"/>
               </a:rPr>
-              <a:t>Proyección 00:30 → cero  ·  tarifa $1.400/m³  ·  08/09/2026</a:t>
+              <a:t>Verde = control WES  ·  dorado = propuesta  ·  tarifa $1.400/m³  ·  08/09/2026</a:t>
             </a:r>
           </a:p>
         </p:txBody>
@@ -4390,8 +4390,8 @@
         </p:blipFill>
         <p:spPr>
           <a:xfrm>
-            <a:off x="320040" y="1234440"/>
-            <a:ext cx="11521440" cy="5006981"/>
+            <a:off x="256032" y="1024128"/>
+            <a:ext cx="11658600" cy="6088077"/>
           </a:xfrm>
           <a:prstGeom prst="rect">
             <a:avLst/>
@@ -4432,7 +4432,7 @@
                 </a:solidFill>
                 <a:latin typeface="Calibri"/>
               </a:rPr>
-              <a:t>Estanque Sur no entra (no es control WES). DL Kennedy no se propone.</a:t>
+              <a:t>Verde = Norte y SI500. Dorado = a copiar. Estanque Sur no entra. DL Kennedy no se propone.</a:t>
             </a:r>
           </a:p>
         </p:txBody>
